--- a/docs/presentaciones/02-paquetes-upstream.pptx
+++ b/docs/presentaciones/02-paquetes-upstream.pptx
@@ -2092,7 +2092,7 @@
                 <a:ea typeface="Cambria" pitchFamily="34" charset="-122"/>
                 <a:cs typeface="Cambria" pitchFamily="34" charset="-120"/>
               </a:rPr>
-              <a:t>Cuatro ficheros explican la frontera entera</a:t>
+              <a:t>Cuatro archivos explican la frontera entera</a:t>
             </a:r>
             <a:endParaRPr lang="en-US" sz="3300" dirty="0"/>
           </a:p>
@@ -2603,7 +2603,7 @@
                 <a:ea typeface="Calibri" pitchFamily="34" charset="-122"/>
                 <a:cs typeface="Calibri" pitchFamily="34" charset="-120"/>
               </a:rPr>
-              <a:t>Nunca inventes capacidades del solver. </a:t>
+              <a:t>Las capacidades del solver no se inventan. </a:t>
             </a:r>
             <a:pPr indent="0" marL="0">
               <a:lnSpc>
@@ -3071,11 +3071,11 @@
         <p:spPr>
           <a:xfrm>
             <a:off x="594360" y="3611880"/>
-            <a:ext cx="3474720" cy="1572768"/>
+            <a:ext cx="3474720" cy="2240280"/>
           </a:xfrm>
           <a:prstGeom prst="roundRect">
             <a:avLst>
-              <a:gd name="adj" fmla="val 4070"/>
+              <a:gd name="adj" fmla="val 2857"/>
             </a:avLst>
           </a:prstGeom>
           <a:solidFill>
@@ -3159,19 +3159,22 @@
         <p:spPr>
           <a:xfrm>
             <a:off x="1399032" y="3886200"/>
-            <a:ext cx="2423160" cy="347472"/>
-          </a:xfrm>
-          <a:prstGeom prst="rect">
-            <a:avLst/>
-          </a:prstGeom>
-          <a:noFill/>
-          <a:ln/>
-        </p:spPr>
-        <p:txBody>
-          <a:bodyPr wrap="square" lIns="0" tIns="0" rIns="0" bIns="0" rtlCol="0" anchor="ctr"/>
-          <a:lstStyle/>
-          <a:p>
-            <a:pPr indent="0" marL="0">
+            <a:ext cx="2423160" cy="822960"/>
+          </a:xfrm>
+          <a:prstGeom prst="rect">
+            <a:avLst/>
+          </a:prstGeom>
+          <a:noFill/>
+          <a:ln/>
+        </p:spPr>
+        <p:txBody>
+          <a:bodyPr wrap="square" lIns="0" tIns="0" rIns="0" bIns="0" rtlCol="0" anchor="ctr"/>
+          <a:lstStyle/>
+          <a:p>
+            <a:pPr indent="0" marL="0">
+              <a:lnSpc>
+                <a:spcPts val="2100"/>
+              </a:lnSpc>
               <a:buNone/>
             </a:pPr>
             <a:r>
@@ -3197,8 +3200,8 @@
         </p:nvSpPr>
         <p:spPr>
           <a:xfrm>
-            <a:off x="868680" y="4398264"/>
-            <a:ext cx="2926080" cy="566928"/>
+            <a:off x="868680" y="4782312"/>
+            <a:ext cx="2926080" cy="905256"/>
           </a:xfrm>
           <a:prstGeom prst="rect">
             <a:avLst/>
@@ -3240,11 +3243,11 @@
         <p:spPr>
           <a:xfrm>
             <a:off x="4343400" y="3611880"/>
-            <a:ext cx="3474720" cy="1572768"/>
+            <a:ext cx="3474720" cy="2240280"/>
           </a:xfrm>
           <a:prstGeom prst="roundRect">
             <a:avLst>
-              <a:gd name="adj" fmla="val 4070"/>
+              <a:gd name="adj" fmla="val 2857"/>
             </a:avLst>
           </a:prstGeom>
           <a:solidFill>
@@ -3328,19 +3331,22 @@
         <p:spPr>
           <a:xfrm>
             <a:off x="5148072" y="3886200"/>
-            <a:ext cx="2423160" cy="347472"/>
-          </a:xfrm>
-          <a:prstGeom prst="rect">
-            <a:avLst/>
-          </a:prstGeom>
-          <a:noFill/>
-          <a:ln/>
-        </p:spPr>
-        <p:txBody>
-          <a:bodyPr wrap="square" lIns="0" tIns="0" rIns="0" bIns="0" rtlCol="0" anchor="ctr"/>
-          <a:lstStyle/>
-          <a:p>
-            <a:pPr indent="0" marL="0">
+            <a:ext cx="2423160" cy="822960"/>
+          </a:xfrm>
+          <a:prstGeom prst="rect">
+            <a:avLst/>
+          </a:prstGeom>
+          <a:noFill/>
+          <a:ln/>
+        </p:spPr>
+        <p:txBody>
+          <a:bodyPr wrap="square" lIns="0" tIns="0" rIns="0" bIns="0" rtlCol="0" anchor="ctr"/>
+          <a:lstStyle/>
+          <a:p>
+            <a:pPr indent="0" marL="0">
+              <a:lnSpc>
+                <a:spcPts val="2100"/>
+              </a:lnSpc>
               <a:buNone/>
             </a:pPr>
             <a:r>
@@ -3366,8 +3372,8 @@
         </p:nvSpPr>
         <p:spPr>
           <a:xfrm>
-            <a:off x="4617720" y="4398264"/>
-            <a:ext cx="2926080" cy="566928"/>
+            <a:off x="4617720" y="4782312"/>
+            <a:ext cx="2926080" cy="905256"/>
           </a:xfrm>
           <a:prstGeom prst="rect">
             <a:avLst/>
@@ -3409,11 +3415,11 @@
         <p:spPr>
           <a:xfrm>
             <a:off x="8092440" y="3611880"/>
-            <a:ext cx="3474720" cy="1572768"/>
+            <a:ext cx="3474720" cy="2240280"/>
           </a:xfrm>
           <a:prstGeom prst="roundRect">
             <a:avLst>
-              <a:gd name="adj" fmla="val 4070"/>
+              <a:gd name="adj" fmla="val 2857"/>
             </a:avLst>
           </a:prstGeom>
           <a:solidFill>
@@ -3497,19 +3503,22 @@
         <p:spPr>
           <a:xfrm>
             <a:off x="8897112" y="3886200"/>
-            <a:ext cx="2423160" cy="347472"/>
-          </a:xfrm>
-          <a:prstGeom prst="rect">
-            <a:avLst/>
-          </a:prstGeom>
-          <a:noFill/>
-          <a:ln/>
-        </p:spPr>
-        <p:txBody>
-          <a:bodyPr wrap="square" lIns="0" tIns="0" rIns="0" bIns="0" rtlCol="0" anchor="ctr"/>
-          <a:lstStyle/>
-          <a:p>
-            <a:pPr indent="0" marL="0">
+            <a:ext cx="2423160" cy="822960"/>
+          </a:xfrm>
+          <a:prstGeom prst="rect">
+            <a:avLst/>
+          </a:prstGeom>
+          <a:noFill/>
+          <a:ln/>
+        </p:spPr>
+        <p:txBody>
+          <a:bodyPr wrap="square" lIns="0" tIns="0" rIns="0" bIns="0" rtlCol="0" anchor="ctr"/>
+          <a:lstStyle/>
+          <a:p>
+            <a:pPr indent="0" marL="0">
+              <a:lnSpc>
+                <a:spcPts val="2100"/>
+              </a:lnSpc>
               <a:buNone/>
             </a:pPr>
             <a:r>
@@ -3535,8 +3544,8 @@
         </p:nvSpPr>
         <p:spPr>
           <a:xfrm>
-            <a:off x="8366760" y="4398264"/>
-            <a:ext cx="2926080" cy="566928"/>
+            <a:off x="8366760" y="4782312"/>
+            <a:ext cx="2926080" cy="905256"/>
           </a:xfrm>
           <a:prstGeom prst="rect">
             <a:avLst/>
@@ -4385,7 +4394,7 @@
         </p:nvSpPr>
         <p:spPr>
           <a:xfrm>
-            <a:off x="594360" y="1554480"/>
+            <a:off x="594360" y="1517904"/>
             <a:ext cx="10972800" cy="786384"/>
           </a:xfrm>
           <a:prstGeom prst="roundRect">
@@ -4414,7 +4423,7 @@
         </p:nvSpPr>
         <p:spPr>
           <a:xfrm>
-            <a:off x="868680" y="1664208"/>
+            <a:off x="868680" y="1627632"/>
             <a:ext cx="2514600" cy="566928"/>
           </a:xfrm>
           <a:prstGeom prst="rect">
@@ -4453,7 +4462,7 @@
         </p:nvSpPr>
         <p:spPr>
           <a:xfrm>
-            <a:off x="3474720" y="1664208"/>
+            <a:off x="3474720" y="1627632"/>
             <a:ext cx="3977640" cy="566928"/>
           </a:xfrm>
           <a:prstGeom prst="rect">
@@ -4495,7 +4504,7 @@
         </p:nvSpPr>
         <p:spPr>
           <a:xfrm>
-            <a:off x="7589520" y="1645920"/>
+            <a:off x="7589520" y="1609344"/>
             <a:ext cx="3703320" cy="603504"/>
           </a:xfrm>
           <a:prstGeom prst="rect">
@@ -4537,7 +4546,7 @@
         </p:nvSpPr>
         <p:spPr>
           <a:xfrm>
-            <a:off x="594360" y="2450592"/>
+            <a:off x="594360" y="2386584"/>
             <a:ext cx="10972800" cy="786384"/>
           </a:xfrm>
           <a:prstGeom prst="roundRect">
@@ -4566,7 +4575,7 @@
         </p:nvSpPr>
         <p:spPr>
           <a:xfrm>
-            <a:off x="868680" y="2560320"/>
+            <a:off x="868680" y="2496312"/>
             <a:ext cx="2514600" cy="566928"/>
           </a:xfrm>
           <a:prstGeom prst="rect">
@@ -4605,7 +4614,7 @@
         </p:nvSpPr>
         <p:spPr>
           <a:xfrm>
-            <a:off x="3474720" y="2560320"/>
+            <a:off x="3474720" y="2496312"/>
             <a:ext cx="3977640" cy="566928"/>
           </a:xfrm>
           <a:prstGeom prst="rect">
@@ -4647,7 +4656,7 @@
         </p:nvSpPr>
         <p:spPr>
           <a:xfrm>
-            <a:off x="7589520" y="2542032"/>
+            <a:off x="7589520" y="2478024"/>
             <a:ext cx="3703320" cy="603504"/>
           </a:xfrm>
           <a:prstGeom prst="rect">
@@ -4689,7 +4698,7 @@
         </p:nvSpPr>
         <p:spPr>
           <a:xfrm>
-            <a:off x="594360" y="3346704"/>
+            <a:off x="594360" y="3255264"/>
             <a:ext cx="10972800" cy="786384"/>
           </a:xfrm>
           <a:prstGeom prst="roundRect">
@@ -4718,7 +4727,7 @@
         </p:nvSpPr>
         <p:spPr>
           <a:xfrm>
-            <a:off x="868680" y="3456432"/>
+            <a:off x="868680" y="3364992"/>
             <a:ext cx="2514600" cy="566928"/>
           </a:xfrm>
           <a:prstGeom prst="rect">
@@ -4757,7 +4766,7 @@
         </p:nvSpPr>
         <p:spPr>
           <a:xfrm>
-            <a:off x="3474720" y="3456432"/>
+            <a:off x="3474720" y="3364992"/>
             <a:ext cx="3977640" cy="566928"/>
           </a:xfrm>
           <a:prstGeom prst="rect">
@@ -4799,7 +4808,7 @@
         </p:nvSpPr>
         <p:spPr>
           <a:xfrm>
-            <a:off x="7589520" y="3438144"/>
+            <a:off x="7589520" y="3346704"/>
             <a:ext cx="3703320" cy="603504"/>
           </a:xfrm>
           <a:prstGeom prst="rect">
@@ -4841,7 +4850,7 @@
         </p:nvSpPr>
         <p:spPr>
           <a:xfrm>
-            <a:off x="594360" y="4242816"/>
+            <a:off x="594360" y="4123944"/>
             <a:ext cx="10972800" cy="786384"/>
           </a:xfrm>
           <a:prstGeom prst="roundRect">
@@ -4870,7 +4879,7 @@
         </p:nvSpPr>
         <p:spPr>
           <a:xfrm>
-            <a:off x="868680" y="4352544"/>
+            <a:off x="868680" y="4233672"/>
             <a:ext cx="2514600" cy="566928"/>
           </a:xfrm>
           <a:prstGeom prst="rect">
@@ -4909,7 +4918,7 @@
         </p:nvSpPr>
         <p:spPr>
           <a:xfrm>
-            <a:off x="3474720" y="4352544"/>
+            <a:off x="3474720" y="4233672"/>
             <a:ext cx="3977640" cy="566928"/>
           </a:xfrm>
           <a:prstGeom prst="rect">
@@ -4951,7 +4960,7 @@
         </p:nvSpPr>
         <p:spPr>
           <a:xfrm>
-            <a:off x="7589520" y="4334256"/>
+            <a:off x="7589520" y="4215384"/>
             <a:ext cx="3703320" cy="603504"/>
           </a:xfrm>
           <a:prstGeom prst="rect">
@@ -4993,7 +5002,7 @@
         </p:nvSpPr>
         <p:spPr>
           <a:xfrm>
-            <a:off x="594360" y="5138928"/>
+            <a:off x="594360" y="4992624"/>
             <a:ext cx="10972800" cy="786384"/>
           </a:xfrm>
           <a:prstGeom prst="roundRect">
@@ -5022,7 +5031,7 @@
         </p:nvSpPr>
         <p:spPr>
           <a:xfrm>
-            <a:off x="868680" y="5248656"/>
+            <a:off x="868680" y="5102352"/>
             <a:ext cx="2514600" cy="566928"/>
           </a:xfrm>
           <a:prstGeom prst="rect">
@@ -5061,7 +5070,7 @@
         </p:nvSpPr>
         <p:spPr>
           <a:xfrm>
-            <a:off x="3474720" y="5248656"/>
+            <a:off x="3474720" y="5102352"/>
             <a:ext cx="3977640" cy="566928"/>
           </a:xfrm>
           <a:prstGeom prst="rect">
@@ -5103,7 +5112,7 @@
         </p:nvSpPr>
         <p:spPr>
           <a:xfrm>
-            <a:off x="7589520" y="5230368"/>
+            <a:off x="7589520" y="5084064"/>
             <a:ext cx="3703320" cy="603504"/>
           </a:xfrm>
           <a:prstGeom prst="rect">
@@ -5145,7 +5154,7 @@
         </p:nvSpPr>
         <p:spPr>
           <a:xfrm>
-            <a:off x="594360" y="6108192"/>
+            <a:off x="594360" y="6053328"/>
             <a:ext cx="10972800" cy="502920"/>
           </a:xfrm>
           <a:prstGeom prst="rect">
@@ -6626,7 +6635,7 @@
                 <a:ea typeface="Calibri" pitchFamily="34" charset="-122"/>
                 <a:cs typeface="Calibri" pitchFamily="34" charset="-120"/>
               </a:rPr>
-              <a:t>Un paquete rechazado por dirección o por SLA vencido no es una decisión de ruteo y no debe ocupar una fila de matriz: build_large_matrix cuesta una ida y vuelta por tesela. De ahí dos pasos, triaje y luego matriz.</a:t>
+              <a:t>Un paquete rechazado por dirección o por SLA vencido no es una decisión de ruteo y no debe ocupar una fila de matriz: build_large_matrix cuesta una ida y vuelta de red por bloque. De ahí dos pasos, triaje y luego matriz.</a:t>
             </a:r>
             <a:endParaRPr lang="en-US" sz="1100" dirty="0"/>
           </a:p>
@@ -7454,11 +7463,11 @@
         <p:spPr>
           <a:xfrm>
             <a:off x="594360" y="4114800"/>
-            <a:ext cx="5349240" cy="1600200"/>
+            <a:ext cx="5349240" cy="1783080"/>
           </a:xfrm>
           <a:prstGeom prst="roundRect">
             <a:avLst>
-              <a:gd name="adj" fmla="val 4000"/>
+              <a:gd name="adj" fmla="val 3590"/>
             </a:avLst>
           </a:prstGeom>
           <a:solidFill>
@@ -7542,19 +7551,22 @@
         <p:spPr>
           <a:xfrm>
             <a:off x="1399032" y="4389120"/>
-            <a:ext cx="4297680" cy="347472"/>
-          </a:xfrm>
-          <a:prstGeom prst="rect">
-            <a:avLst/>
-          </a:prstGeom>
-          <a:noFill/>
-          <a:ln/>
-        </p:spPr>
-        <p:txBody>
-          <a:bodyPr wrap="square" lIns="0" tIns="0" rIns="0" bIns="0" rtlCol="0" anchor="ctr"/>
-          <a:lstStyle/>
-          <a:p>
-            <a:pPr indent="0" marL="0">
+            <a:ext cx="4297680" cy="274320"/>
+          </a:xfrm>
+          <a:prstGeom prst="rect">
+            <a:avLst/>
+          </a:prstGeom>
+          <a:noFill/>
+          <a:ln/>
+        </p:spPr>
+        <p:txBody>
+          <a:bodyPr wrap="square" lIns="0" tIns="0" rIns="0" bIns="0" rtlCol="0" anchor="ctr"/>
+          <a:lstStyle/>
+          <a:p>
+            <a:pPr indent="0" marL="0">
+              <a:lnSpc>
+                <a:spcPts val="2100"/>
+              </a:lnSpc>
               <a:buNone/>
             </a:pPr>
             <a:r>
@@ -7580,8 +7592,8 @@
         </p:nvSpPr>
         <p:spPr>
           <a:xfrm>
-            <a:off x="868680" y="4901184"/>
-            <a:ext cx="4800600" cy="594360"/>
+            <a:off x="868680" y="4919472"/>
+            <a:ext cx="4800600" cy="813816"/>
           </a:xfrm>
           <a:prstGeom prst="rect">
             <a:avLst/>
@@ -7608,7 +7620,7 @@
                 <a:ea typeface="Calibri" pitchFamily="34" charset="-122"/>
                 <a:cs typeface="Calibri" pitchFamily="34" charset="-120"/>
               </a:rPr>
-              <a:t>La posición de una furgoneta de recogida es una coordenada — es donde quedó la última valija —, así que no hay id que buscar una vez ha salido del hub.</a:t>
+              <a:t>La posición de una furgoneta de recolección es una coordenada — es donde quedó la última valija —, así que no hay id que buscar una vez ha salido del hub.</a:t>
             </a:r>
             <a:endParaRPr lang="en-US" sz="1250" dirty="0"/>
           </a:p>
@@ -7623,11 +7635,11 @@
         <p:spPr>
           <a:xfrm>
             <a:off x="6217920" y="4114800"/>
-            <a:ext cx="5349240" cy="1600200"/>
+            <a:ext cx="5349240" cy="1783080"/>
           </a:xfrm>
           <a:prstGeom prst="roundRect">
             <a:avLst>
-              <a:gd name="adj" fmla="val 4000"/>
+              <a:gd name="adj" fmla="val 3590"/>
             </a:avLst>
           </a:prstGeom>
           <a:solidFill>
@@ -7711,19 +7723,22 @@
         <p:spPr>
           <a:xfrm>
             <a:off x="7022592" y="4389120"/>
-            <a:ext cx="4297680" cy="347472"/>
-          </a:xfrm>
-          <a:prstGeom prst="rect">
-            <a:avLst/>
-          </a:prstGeom>
-          <a:noFill/>
-          <a:ln/>
-        </p:spPr>
-        <p:txBody>
-          <a:bodyPr wrap="square" lIns="0" tIns="0" rIns="0" bIns="0" rtlCol="0" anchor="ctr"/>
-          <a:lstStyle/>
-          <a:p>
-            <a:pPr indent="0" marL="0">
+            <a:ext cx="4297680" cy="274320"/>
+          </a:xfrm>
+          <a:prstGeom prst="rect">
+            <a:avLst/>
+          </a:prstGeom>
+          <a:noFill/>
+          <a:ln/>
+        </p:spPr>
+        <p:txBody>
+          <a:bodyPr wrap="square" lIns="0" tIns="0" rIns="0" bIns="0" rtlCol="0" anchor="ctr"/>
+          <a:lstStyle/>
+          <a:p>
+            <a:pPr indent="0" marL="0">
+              <a:lnSpc>
+                <a:spcPts val="2100"/>
+              </a:lnSpc>
               <a:buNone/>
             </a:pPr>
             <a:r>
@@ -7749,8 +7764,8 @@
         </p:nvSpPr>
         <p:spPr>
           <a:xfrm>
-            <a:off x="6492240" y="4901184"/>
-            <a:ext cx="4800600" cy="594360"/>
+            <a:off x="6492240" y="4919472"/>
+            <a:ext cx="4800600" cy="813816"/>
           </a:xfrm>
           <a:prstGeom prst="rect">
             <a:avLst/>
@@ -8032,19 +8047,22 @@
         <p:spPr>
           <a:xfrm>
             <a:off x="1399032" y="2423160"/>
-            <a:ext cx="4297680" cy="347472"/>
-          </a:xfrm>
-          <a:prstGeom prst="rect">
-            <a:avLst/>
-          </a:prstGeom>
-          <a:noFill/>
-          <a:ln/>
-        </p:spPr>
-        <p:txBody>
-          <a:bodyPr wrap="square" lIns="0" tIns="0" rIns="0" bIns="0" rtlCol="0" anchor="ctr"/>
-          <a:lstStyle/>
-          <a:p>
-            <a:pPr indent="0" marL="0">
+            <a:ext cx="4297680" cy="274320"/>
+          </a:xfrm>
+          <a:prstGeom prst="rect">
+            <a:avLst/>
+          </a:prstGeom>
+          <a:noFill/>
+          <a:ln/>
+        </p:spPr>
+        <p:txBody>
+          <a:bodyPr wrap="square" lIns="0" tIns="0" rIns="0" bIns="0" rtlCol="0" anchor="ctr"/>
+          <a:lstStyle/>
+          <a:p>
+            <a:pPr indent="0" marL="0">
+              <a:lnSpc>
+                <a:spcPts val="2100"/>
+              </a:lnSpc>
               <a:buNone/>
             </a:pPr>
             <a:r>
@@ -8070,8 +8088,8 @@
         </p:nvSpPr>
         <p:spPr>
           <a:xfrm>
-            <a:off x="868680" y="2935224"/>
-            <a:ext cx="4800600" cy="457200"/>
+            <a:off x="868680" y="2953512"/>
+            <a:ext cx="4800600" cy="493776"/>
           </a:xfrm>
           <a:prstGeom prst="rect">
             <a:avLst/>
@@ -8201,19 +8219,22 @@
         <p:spPr>
           <a:xfrm>
             <a:off x="7022592" y="2423160"/>
-            <a:ext cx="4297680" cy="347472"/>
-          </a:xfrm>
-          <a:prstGeom prst="rect">
-            <a:avLst/>
-          </a:prstGeom>
-          <a:noFill/>
-          <a:ln/>
-        </p:spPr>
-        <p:txBody>
-          <a:bodyPr wrap="square" lIns="0" tIns="0" rIns="0" bIns="0" rtlCol="0" anchor="ctr"/>
-          <a:lstStyle/>
-          <a:p>
-            <a:pPr indent="0" marL="0">
+            <a:ext cx="4297680" cy="274320"/>
+          </a:xfrm>
+          <a:prstGeom prst="rect">
+            <a:avLst/>
+          </a:prstGeom>
+          <a:noFill/>
+          <a:ln/>
+        </p:spPr>
+        <p:txBody>
+          <a:bodyPr wrap="square" lIns="0" tIns="0" rIns="0" bIns="0" rtlCol="0" anchor="ctr"/>
+          <a:lstStyle/>
+          <a:p>
+            <a:pPr indent="0" marL="0">
+              <a:lnSpc>
+                <a:spcPts val="2100"/>
+              </a:lnSpc>
               <a:buNone/>
             </a:pPr>
             <a:r>
@@ -8239,8 +8260,8 @@
         </p:nvSpPr>
         <p:spPr>
           <a:xfrm>
-            <a:off x="6492240" y="2935224"/>
-            <a:ext cx="4800600" cy="457200"/>
+            <a:off x="6492240" y="2953512"/>
+            <a:ext cx="4800600" cy="493776"/>
           </a:xfrm>
           <a:prstGeom prst="rect">
             <a:avLst/>
@@ -8370,19 +8391,22 @@
         <p:spPr>
           <a:xfrm>
             <a:off x="1399032" y="3995928"/>
-            <a:ext cx="4297680" cy="347472"/>
-          </a:xfrm>
-          <a:prstGeom prst="rect">
-            <a:avLst/>
-          </a:prstGeom>
-          <a:noFill/>
-          <a:ln/>
-        </p:spPr>
-        <p:txBody>
-          <a:bodyPr wrap="square" lIns="0" tIns="0" rIns="0" bIns="0" rtlCol="0" anchor="ctr"/>
-          <a:lstStyle/>
-          <a:p>
-            <a:pPr indent="0" marL="0">
+            <a:ext cx="4297680" cy="274320"/>
+          </a:xfrm>
+          <a:prstGeom prst="rect">
+            <a:avLst/>
+          </a:prstGeom>
+          <a:noFill/>
+          <a:ln/>
+        </p:spPr>
+        <p:txBody>
+          <a:bodyPr wrap="square" lIns="0" tIns="0" rIns="0" bIns="0" rtlCol="0" anchor="ctr"/>
+          <a:lstStyle/>
+          <a:p>
+            <a:pPr indent="0" marL="0">
+              <a:lnSpc>
+                <a:spcPts val="2100"/>
+              </a:lnSpc>
               <a:buNone/>
             </a:pPr>
             <a:r>
@@ -8408,8 +8432,8 @@
         </p:nvSpPr>
         <p:spPr>
           <a:xfrm>
-            <a:off x="868680" y="4507992"/>
-            <a:ext cx="4800600" cy="457200"/>
+            <a:off x="868680" y="4526280"/>
+            <a:ext cx="4800600" cy="493776"/>
           </a:xfrm>
           <a:prstGeom prst="rect">
             <a:avLst/>
@@ -8539,19 +8563,22 @@
         <p:spPr>
           <a:xfrm>
             <a:off x="7022592" y="3995928"/>
-            <a:ext cx="4297680" cy="347472"/>
-          </a:xfrm>
-          <a:prstGeom prst="rect">
-            <a:avLst/>
-          </a:prstGeom>
-          <a:noFill/>
-          <a:ln/>
-        </p:spPr>
-        <p:txBody>
-          <a:bodyPr wrap="square" lIns="0" tIns="0" rIns="0" bIns="0" rtlCol="0" anchor="ctr"/>
-          <a:lstStyle/>
-          <a:p>
-            <a:pPr indent="0" marL="0">
+            <a:ext cx="4297680" cy="274320"/>
+          </a:xfrm>
+          <a:prstGeom prst="rect">
+            <a:avLst/>
+          </a:prstGeom>
+          <a:noFill/>
+          <a:ln/>
+        </p:spPr>
+        <p:txBody>
+          <a:bodyPr wrap="square" lIns="0" tIns="0" rIns="0" bIns="0" rtlCol="0" anchor="ctr"/>
+          <a:lstStyle/>
+          <a:p>
+            <a:pPr indent="0" marL="0">
+              <a:lnSpc>
+                <a:spcPts val="2100"/>
+              </a:lnSpc>
               <a:buNone/>
             </a:pPr>
             <a:r>
@@ -8577,8 +8604,8 @@
         </p:nvSpPr>
         <p:spPr>
           <a:xfrm>
-            <a:off x="6492240" y="4507992"/>
-            <a:ext cx="4800600" cy="457200"/>
+            <a:off x="6492240" y="4526280"/>
+            <a:ext cx="4800600" cy="493776"/>
           </a:xfrm>
           <a:prstGeom prst="rect">
             <a:avLst/>
@@ -8647,7 +8674,7 @@
                 <a:ea typeface="Calibri" pitchFamily="34" charset="-122"/>
                 <a:cs typeface="Calibri" pitchFamily="34" charset="-120"/>
               </a:rPr>
-              <a:t>Los modelos de entrega viven aquí, en models/, y no upstream: describen esta operación y se leen por ruta — este repositorio distribuye los ficheros y sabe dónde están.</a:t>
+              <a:t>Los modelos de entrega viven aquí, en models/, y no upstream: describen esta operación y se leen por ruta — este repositorio distribuye los archivos y sabe dónde están.</a:t>
             </a:r>
             <a:endParaRPr lang="en-US" sz="1150" dirty="0"/>
           </a:p>
